--- a/Trimester-1/aakashlalkrishnani_project_01.pptx
+++ b/Trimester-1/aakashlalkrishnani_project_01.pptx
@@ -3032,7 +3032,7 @@
         <p:spPr>
           <a:xfrm>
             <a:off x="507987" y="530248"/>
-            <a:ext cx="11175720" cy="1211064"/>
+            <a:ext cx="10500672" cy="1211064"/>
           </a:xfrm>
           <a:prstGeom prst="rect">
             <a:avLst/>
@@ -3053,7 +3053,7 @@
               <a:buNone/>
             </a:pPr>
             <a:r>
-              <a:rPr lang="en-US" sz="3400" b="1" kern="100" spc="-73" dirty="0">
+              <a:rPr lang="en-US" sz="3600" b="1" kern="100" spc="-73" dirty="0">
                 <a:solidFill>
                   <a:srgbClr val="F2F5FA"/>
                 </a:solidFill>
@@ -3063,7 +3063,7 @@
               </a:rPr>
               <a:t>A shared data foundation enables three focused AI solutions</a:t>
             </a:r>
-            <a:endParaRPr lang="en-US" sz="3400" dirty="0"/>
+            <a:endParaRPr lang="en-US" sz="3600" dirty="0"/>
           </a:p>
         </p:txBody>
       </p:sp>
